--- a/iofm-new-excel-stack.pptx
+++ b/iofm-new-excel-stack.pptx
@@ -247,7 +247,7 @@
           <a:p>
             <a:fld id="{17A98A70-FA8C-4354-959C-C70678AC9BCF}" type="datetimeFigureOut">
               <a:rPr lang="en-US" smtClean="0"/>
-              <a:t>2/26/2026</a:t>
+              <a:t>3/6/2026</a:t>
             </a:fld>
             <a:endParaRPr lang="en-US"/>
           </a:p>
@@ -1517,7 +1517,7 @@
             <a:fld id="{1D8BD707-D9CF-40AE-B4C6-C98DA3205C09}" type="datetimeFigureOut">
               <a:rPr lang="en-US" smtClean="0"/>
               <a:pPr/>
-              <a:t>2/26/2026</a:t>
+              <a:t>3/6/2026</a:t>
             </a:fld>
             <a:endParaRPr lang="en-US"/>
           </a:p>
@@ -1682,7 +1682,7 @@
             <a:fld id="{1D8BD707-D9CF-40AE-B4C6-C98DA3205C09}" type="datetimeFigureOut">
               <a:rPr lang="en-US" smtClean="0"/>
               <a:pPr/>
-              <a:t>2/26/2026</a:t>
+              <a:t>3/6/2026</a:t>
             </a:fld>
             <a:endParaRPr lang="en-US"/>
           </a:p>
@@ -1857,7 +1857,7 @@
             <a:fld id="{1D8BD707-D9CF-40AE-B4C6-C98DA3205C09}" type="datetimeFigureOut">
               <a:rPr lang="en-US" smtClean="0"/>
               <a:pPr/>
-              <a:t>2/26/2026</a:t>
+              <a:t>3/6/2026</a:t>
             </a:fld>
             <a:endParaRPr lang="en-US"/>
           </a:p>
@@ -2022,7 +2022,7 @@
             <a:fld id="{1D8BD707-D9CF-40AE-B4C6-C98DA3205C09}" type="datetimeFigureOut">
               <a:rPr lang="en-US" smtClean="0"/>
               <a:pPr/>
-              <a:t>2/26/2026</a:t>
+              <a:t>3/6/2026</a:t>
             </a:fld>
             <a:endParaRPr lang="en-US"/>
           </a:p>
@@ -2264,7 +2264,7 @@
             <a:fld id="{1D8BD707-D9CF-40AE-B4C6-C98DA3205C09}" type="datetimeFigureOut">
               <a:rPr lang="en-US" smtClean="0"/>
               <a:pPr/>
-              <a:t>2/26/2026</a:t>
+              <a:t>3/6/2026</a:t>
             </a:fld>
             <a:endParaRPr lang="en-US"/>
           </a:p>
@@ -2546,7 +2546,7 @@
             <a:fld id="{1D8BD707-D9CF-40AE-B4C6-C98DA3205C09}" type="datetimeFigureOut">
               <a:rPr lang="en-US" smtClean="0"/>
               <a:pPr/>
-              <a:t>2/26/2026</a:t>
+              <a:t>3/6/2026</a:t>
             </a:fld>
             <a:endParaRPr lang="en-US"/>
           </a:p>
@@ -2962,7 +2962,7 @@
             <a:fld id="{1D8BD707-D9CF-40AE-B4C6-C98DA3205C09}" type="datetimeFigureOut">
               <a:rPr lang="en-US" smtClean="0"/>
               <a:pPr/>
-              <a:t>2/26/2026</a:t>
+              <a:t>3/6/2026</a:t>
             </a:fld>
             <a:endParaRPr lang="en-US"/>
           </a:p>
@@ -3076,7 +3076,7 @@
             <a:fld id="{1D8BD707-D9CF-40AE-B4C6-C98DA3205C09}" type="datetimeFigureOut">
               <a:rPr lang="en-US" smtClean="0"/>
               <a:pPr/>
-              <a:t>2/26/2026</a:t>
+              <a:t>3/6/2026</a:t>
             </a:fld>
             <a:endParaRPr lang="en-US"/>
           </a:p>
@@ -3168,7 +3168,7 @@
             <a:fld id="{1D8BD707-D9CF-40AE-B4C6-C98DA3205C09}" type="datetimeFigureOut">
               <a:rPr lang="en-US" smtClean="0"/>
               <a:pPr/>
-              <a:t>2/26/2026</a:t>
+              <a:t>3/6/2026</a:t>
             </a:fld>
             <a:endParaRPr lang="en-US"/>
           </a:p>
@@ -3440,7 +3440,7 @@
             <a:fld id="{1D8BD707-D9CF-40AE-B4C6-C98DA3205C09}" type="datetimeFigureOut">
               <a:rPr lang="en-US" smtClean="0"/>
               <a:pPr/>
-              <a:t>2/26/2026</a:t>
+              <a:t>3/6/2026</a:t>
             </a:fld>
             <a:endParaRPr lang="en-US"/>
           </a:p>
@@ -3689,7 +3689,7 @@
             <a:fld id="{1D8BD707-D9CF-40AE-B4C6-C98DA3205C09}" type="datetimeFigureOut">
               <a:rPr lang="en-US" smtClean="0"/>
               <a:pPr/>
-              <a:t>2/26/2026</a:t>
+              <a:t>3/6/2026</a:t>
             </a:fld>
             <a:endParaRPr lang="en-US"/>
           </a:p>
@@ -3902,7 +3902,7 @@
             <a:fld id="{1D8BD707-D9CF-40AE-B4C6-C98DA3205C09}" type="datetimeFigureOut">
               <a:rPr lang="en-US" smtClean="0"/>
               <a:pPr/>
-              <a:t>2/26/2026</a:t>
+              <a:t>3/6/2026</a:t>
             </a:fld>
             <a:endParaRPr lang="en-US"/>
           </a:p>
@@ -4580,7 +4580,7 @@
                 </a:solidFill>
                 <a:latin typeface="Pragmatica" panose="020B0403040502020204" pitchFamily="34" charset="0"/>
               </a:rPr>
-              <a:t>Draft-first reporting workflows with Agent Mode</a:t>
+              <a:t>First-draft reporting workflows with Agent Mode</a:t>
             </a:r>
           </a:p>
           <a:p>
@@ -6547,7 +6547,7 @@
         <p:spPr>
           <a:xfrm>
             <a:off x="260431" y="329879"/>
-            <a:ext cx="8906720" cy="6296980"/>
+            <a:ext cx="8906720" cy="7220310"/>
           </a:xfrm>
           <a:prstGeom prst="rect">
             <a:avLst/>
@@ -6567,7 +6567,7 @@
                 </a:solidFill>
                 <a:latin typeface="Pragmatica" panose="020B0403040502020204" pitchFamily="34" charset="0"/>
               </a:rPr>
-              <a:t>Scenario-based payment timing analysis</a:t>
+              <a:t>Scenario-based payment timing analysis with Analyst Agent</a:t>
             </a:r>
           </a:p>
           <a:p>
@@ -6627,17 +6627,7 @@
                 <a:latin typeface="Pragmatica" panose="020B0403040502020204"/>
                 <a:sym typeface="Consolas"/>
               </a:rPr>
-              <a:t>Run a reproducible scenario </a:t>
-            </a:r>
-            <a:r>
-              <a:rPr lang="en-US" sz="3600">
-                <a:solidFill>
-                  <a:srgbClr val="C00000"/>
-                </a:solidFill>
-                <a:latin typeface="Pragmatica" panose="020B0403040502020204"/>
-                <a:sym typeface="Consolas"/>
-              </a:rPr>
-              <a:t>analysis </a:t>
+              <a:t>Run a reproducible scenario analysis </a:t>
             </a:r>
           </a:p>
           <a:p>
